--- a/curso/pptx/S18.pptx
+++ b/curso/pptx/S18.pptx
@@ -4094,7 +4094,7 @@
                 </a:solidFill>
                 <a:latin typeface="Nunito Sans"/>
               </a:rPr>
-              <a:t>1. ¿Qué me piden creer o hacer?</a:t>
+              <a:t>1. 他们要我相信什么，或做什么？</a:t>
             </a:r>
           </a:p>
           <a:p>
@@ -4119,7 +4119,7 @@
                 </a:solidFill>
                 <a:latin typeface="Nunito Sans"/>
               </a:rPr>
-              <a:t>2. ¿Qué razón me dan?</a:t>
+              <a:t>2. 他们给了我什么理由？</a:t>
             </a:r>
           </a:p>
           <a:p>
@@ -4144,7 +4144,7 @@
                 </a:solidFill>
                 <a:latin typeface="Nunito Sans"/>
               </a:rPr>
-              <a:t>3. ¿Viene a cuento? ¿Habla de la idea o de otra cosa?</a:t>
+              <a:t>3. 切题吗？说的是这个想法，还是别的事情？</a:t>
             </a:r>
           </a:p>
           <a:p>
@@ -4169,7 +4169,7 @@
                 </a:solidFill>
                 <a:latin typeface="Nunito Sans"/>
               </a:rPr>
-              <a:t>4. Si es un truco, ponle </a:t>
+              <a:t>4. 如果是花招，给它起个</a:t>
             </a:r>
             <a:r>
               <a:rPr sz="2800" b="1">
@@ -4178,7 +4178,7 @@
                 </a:solidFill>
                 <a:latin typeface="Nunito Sans"/>
               </a:rPr>
-              <a:t>nombre</a:t>
+              <a:t>名字</a:t>
             </a:r>
             <a:r>
               <a:rPr sz="2800" b="0">
@@ -4187,7 +4187,7 @@
                 </a:solidFill>
                 <a:latin typeface="Nunito Sans"/>
               </a:rPr>
-              <a:t> y hazle su </a:t>
+              <a:t>，问它那个</a:t>
             </a:r>
             <a:r>
               <a:rPr sz="2800" b="1">
@@ -4196,7 +4196,7 @@
                 </a:solidFill>
                 <a:latin typeface="Nunito Sans"/>
               </a:rPr>
-              <a:t>pregunta</a:t>
+              <a:t>问题</a:t>
             </a:r>
           </a:p>
         </p:txBody>
@@ -6737,7 +6737,7 @@
                 </a:solidFill>
                 <a:latin typeface="Nunito Sans"/>
               </a:rPr>
-              <a:t>Suele fallar: ¿viene a cuento? o ¿es suficiente?</a:t>
+              <a:t>常常出错在：切题吗？或者：足够吗？</a:t>
             </a:r>
           </a:p>
           <a:p>
@@ -6762,7 +6762,7 @@
                 </a:solidFill>
                 <a:latin typeface="Nunito Sans"/>
               </a:rPr>
-              <a:t>Puede tener una conclusión verdadera: falla el camino</a:t>
+              <a:t>可以有一个真的结论：错的是过程</a:t>
             </a:r>
           </a:p>
         </p:txBody>
@@ -7802,7 +7802,7 @@
                 </a:solidFill>
                 <a:latin typeface="Nunito Sans"/>
               </a:rPr>
-              <a:t>Atacar a la persona sin más</a:t>
+              <a:t>单纯攻击个人</a:t>
             </a:r>
           </a:p>
           <a:p>
@@ -7827,7 +7827,7 @@
                 </a:solidFill>
                 <a:latin typeface="Nunito Sans"/>
               </a:rPr>
-              <a:t>Exagerar la idea del otro</a:t>
+              <a:t>夸大别人的想法</a:t>
             </a:r>
           </a:p>
           <a:p>
@@ -7852,7 +7852,7 @@
                 </a:solidFill>
                 <a:latin typeface="Nunito Sans"/>
               </a:rPr>
-              <a:t>Asustar sin pruebas</a:t>
+              <a:t>没有证据就吓唬人</a:t>
             </a:r>
           </a:p>
           <a:p>
@@ -7877,7 +7877,7 @@
                 </a:solidFill>
                 <a:latin typeface="Nunito Sans"/>
               </a:rPr>
-              <a:t>Cambiar de tema para esquivar</a:t>
+              <a:t>转移话题来躲闪</a:t>
             </a:r>
           </a:p>
         </p:txBody>
@@ -8007,7 +8007,7 @@
                 </a:solidFill>
                 <a:latin typeface="Nunito Sans"/>
               </a:rPr>
-              <a:t>Dudar de quien gana dinero con ello</a:t>
+              <a:t>怀疑靠它赚钱的人</a:t>
             </a:r>
           </a:p>
           <a:p>
@@ -8032,7 +8032,7 @@
                 </a:solidFill>
                 <a:latin typeface="Nunito Sans"/>
               </a:rPr>
-              <a:t>Resumir la idea con justicia</a:t>
+              <a:t>公正地概括这个想法</a:t>
             </a:r>
           </a:p>
           <a:p>
@@ -8057,7 +8057,7 @@
                 </a:solidFill>
                 <a:latin typeface="Nunito Sans"/>
               </a:rPr>
-              <a:t>Avisar de un peligro real con razones</a:t>
+              <a:t>用理由提醒一个真实的危险</a:t>
             </a:r>
           </a:p>
           <a:p>
@@ -8082,7 +8082,7 @@
                 </a:solidFill>
                 <a:latin typeface="Nunito Sans"/>
               </a:rPr>
-              <a:t>Cambiar de tema por algo urgente</a:t>
+              <a:t>因为紧急的事而转移话题</a:t>
             </a:r>
           </a:p>
         </p:txBody>
